--- a/sjoskolan/vecka-38/aktuell/Vecka_02_Franskiljning_matning_Distans_v2_elev.pptx
+++ b/sjoskolan/vecka-38/aktuell/Vecka_02_Franskiljning_matning_Distans_v2_elev.pptx
@@ -3549,7 +3549,7 @@
                 <a:ea typeface="Calibri"/>
                 <a:cs typeface="Calibri"/>
               </a:rPr>
-              <a:t>Vecka 2 · 14–18 september 2026</a:t>
+              <a:t>Kursvecka 2 · vecka 38 · 14–18 september 2026</a:t>
             </a:r>
           </a:p>
           <a:p xmlns:a="http://schemas.openxmlformats.org/drawingml/2006/main">
@@ -4013,7 +4013,7 @@
                 <a:ea typeface="Calibri"/>
                 <a:cs typeface="Calibri"/>
               </a:rPr>
-              <a:t>Vecka 2  ·  10 / 19</a:t>
+              <a:t>Kursvecka 2 · v. 38  ·  10 / 19</a:t>
             </a:r>
           </a:p>
         </p:txBody>
@@ -4157,6 +4157,10 @@
             </a:solidFill>
           </a:ln>
         </p:spPr>
+        <p:txBody xmlns:a="http://schemas.openxmlformats.org/drawingml/2006/main">
+          <a:bodyPr/>
+          <a:p/>
+        </p:txBody>
       </p:sp>
       <p:sp>
         <p:nvSpPr>
@@ -4367,6 +4371,10 @@
             </a:solidFill>
           </a:ln>
         </p:spPr>
+        <p:txBody xmlns:a="http://schemas.openxmlformats.org/drawingml/2006/main">
+          <a:bodyPr/>
+          <a:p/>
+        </p:txBody>
       </p:sp>
       <p:sp>
         <p:nvSpPr>
@@ -4406,6 +4414,10 @@
             </a:solidFill>
           </a:ln>
         </p:spPr>
+        <p:txBody xmlns:a="http://schemas.openxmlformats.org/drawingml/2006/main">
+          <a:bodyPr/>
+          <a:p/>
+        </p:txBody>
       </p:sp>
       <p:sp>
         <p:nvSpPr>
@@ -4445,6 +4457,10 @@
             </a:solidFill>
           </a:ln>
         </p:spPr>
+        <p:txBody xmlns:a="http://schemas.openxmlformats.org/drawingml/2006/main">
+          <a:bodyPr/>
+          <a:p/>
+        </p:txBody>
       </p:sp>
       <p:sp>
         <p:nvSpPr>
@@ -4484,6 +4500,10 @@
             </a:solidFill>
           </a:ln>
         </p:spPr>
+        <p:txBody xmlns:a="http://schemas.openxmlformats.org/drawingml/2006/main">
+          <a:bodyPr/>
+          <a:p/>
+        </p:txBody>
       </p:sp>
       <p:sp>
         <p:nvSpPr>
@@ -4523,6 +4543,10 @@
             </a:solidFill>
           </a:ln>
         </p:spPr>
+        <p:txBody xmlns:a="http://schemas.openxmlformats.org/drawingml/2006/main">
+          <a:bodyPr/>
+          <a:p/>
+        </p:txBody>
       </p:sp>
       <p:sp>
         <p:nvSpPr>
@@ -4553,6 +4577,10 @@
             </a:solidFill>
           </a:ln>
         </p:spPr>
+        <p:txBody xmlns:a="http://schemas.openxmlformats.org/drawingml/2006/main">
+          <a:bodyPr/>
+          <a:p/>
+        </p:txBody>
       </p:sp>
       <p:sp>
         <p:nvSpPr>
@@ -4649,6 +4677,10 @@
             </a:solidFill>
           </a:ln>
         </p:spPr>
+        <p:txBody xmlns:a="http://schemas.openxmlformats.org/drawingml/2006/main">
+          <a:bodyPr/>
+          <a:p/>
+        </p:txBody>
       </p:sp>
       <p:sp>
         <p:nvSpPr>
@@ -4688,6 +4720,10 @@
             </a:solidFill>
           </a:ln>
         </p:spPr>
+        <p:txBody xmlns:a="http://schemas.openxmlformats.org/drawingml/2006/main">
+          <a:bodyPr/>
+          <a:p/>
+        </p:txBody>
       </p:sp>
       <p:sp>
         <p:nvSpPr>
@@ -4718,6 +4754,10 @@
             </a:solidFill>
           </a:ln>
         </p:spPr>
+        <p:txBody xmlns:a="http://schemas.openxmlformats.org/drawingml/2006/main">
+          <a:bodyPr/>
+          <a:p/>
+        </p:txBody>
       </p:sp>
       <p:sp>
         <p:nvSpPr>
@@ -4757,6 +4797,10 @@
             </a:solidFill>
           </a:ln>
         </p:spPr>
+        <p:txBody xmlns:a="http://schemas.openxmlformats.org/drawingml/2006/main">
+          <a:bodyPr/>
+          <a:p/>
+        </p:txBody>
       </p:sp>
       <p:sp>
         <p:nvSpPr>
@@ -4853,6 +4897,10 @@
             </a:solidFill>
           </a:ln>
         </p:spPr>
+        <p:txBody xmlns:a="http://schemas.openxmlformats.org/drawingml/2006/main">
+          <a:bodyPr/>
+          <a:p/>
+        </p:txBody>
       </p:sp>
       <p:sp>
         <p:nvSpPr>
@@ -4892,6 +4940,10 @@
             </a:solidFill>
           </a:ln>
         </p:spPr>
+        <p:txBody xmlns:a="http://schemas.openxmlformats.org/drawingml/2006/main">
+          <a:bodyPr/>
+          <a:p/>
+        </p:txBody>
       </p:sp>
       <p:sp>
         <p:nvSpPr>
@@ -4931,6 +4983,10 @@
             </a:solidFill>
           </a:ln>
         </p:spPr>
+        <p:txBody xmlns:a="http://schemas.openxmlformats.org/drawingml/2006/main">
+          <a:bodyPr/>
+          <a:p/>
+        </p:txBody>
       </p:sp>
       <p:sp>
         <p:nvSpPr>
@@ -4970,6 +5026,10 @@
             </a:solidFill>
           </a:ln>
         </p:spPr>
+        <p:txBody xmlns:a="http://schemas.openxmlformats.org/drawingml/2006/main">
+          <a:bodyPr/>
+          <a:p/>
+        </p:txBody>
       </p:sp>
       <p:sp>
         <p:nvSpPr>
@@ -5000,6 +5060,10 @@
             </a:solidFill>
           </a:ln>
         </p:spPr>
+        <p:txBody xmlns:a="http://schemas.openxmlformats.org/drawingml/2006/main">
+          <a:bodyPr/>
+          <a:p/>
+        </p:txBody>
       </p:sp>
       <p:sp>
         <p:nvSpPr>
@@ -5096,6 +5160,10 @@
             </a:solidFill>
           </a:ln>
         </p:spPr>
+        <p:txBody xmlns:a="http://schemas.openxmlformats.org/drawingml/2006/main">
+          <a:bodyPr/>
+          <a:p/>
+        </p:txBody>
       </p:sp>
       <p:sp>
         <p:nvSpPr>
@@ -5126,6 +5194,10 @@
             </a:solidFill>
           </a:ln>
         </p:spPr>
+        <p:txBody xmlns:a="http://schemas.openxmlformats.org/drawingml/2006/main">
+          <a:bodyPr/>
+          <a:p/>
+        </p:txBody>
       </p:sp>
       <p:sp>
         <p:nvSpPr>
@@ -5156,6 +5228,10 @@
             </a:solidFill>
           </a:ln>
         </p:spPr>
+        <p:txBody xmlns:a="http://schemas.openxmlformats.org/drawingml/2006/main">
+          <a:bodyPr/>
+          <a:p/>
+        </p:txBody>
       </p:sp>
       <p:sp>
         <p:nvSpPr>
@@ -5380,7 +5456,7 @@
                 <a:ea typeface="Calibri"/>
                 <a:cs typeface="Calibri"/>
               </a:rPr>
-              <a:t>Vecka 2  ·  11 / 19</a:t>
+              <a:t>Kursvecka 2 · v. 38  ·  11 / 19</a:t>
             </a:r>
           </a:p>
         </p:txBody>
@@ -5533,6 +5609,10 @@
             </a:solidFill>
           </a:ln>
         </p:spPr>
+        <p:txBody xmlns:a="http://schemas.openxmlformats.org/drawingml/2006/main">
+          <a:bodyPr/>
+          <a:p/>
+        </p:txBody>
       </p:sp>
       <p:sp>
         <p:nvSpPr>
@@ -5563,6 +5643,10 @@
             </a:solidFill>
           </a:ln>
         </p:spPr>
+        <p:txBody xmlns:a="http://schemas.openxmlformats.org/drawingml/2006/main">
+          <a:bodyPr/>
+          <a:p/>
+        </p:txBody>
       </p:sp>
       <p:sp>
         <p:nvSpPr>
@@ -5602,6 +5686,10 @@
             </a:solidFill>
           </a:ln>
         </p:spPr>
+        <p:txBody xmlns:a="http://schemas.openxmlformats.org/drawingml/2006/main">
+          <a:bodyPr/>
+          <a:p/>
+        </p:txBody>
       </p:sp>
       <p:sp>
         <p:nvSpPr>
@@ -5698,6 +5786,10 @@
             </a:solidFill>
           </a:ln>
         </p:spPr>
+        <p:txBody xmlns:a="http://schemas.openxmlformats.org/drawingml/2006/main">
+          <a:bodyPr/>
+          <a:p/>
+        </p:txBody>
       </p:sp>
       <p:sp>
         <p:nvSpPr>
@@ -5737,6 +5829,10 @@
             </a:solidFill>
           </a:ln>
         </p:spPr>
+        <p:txBody xmlns:a="http://schemas.openxmlformats.org/drawingml/2006/main">
+          <a:bodyPr/>
+          <a:p/>
+        </p:txBody>
       </p:sp>
       <p:sp>
         <p:nvSpPr>
@@ -5776,6 +5872,10 @@
             </a:solidFill>
           </a:ln>
         </p:spPr>
+        <p:txBody xmlns:a="http://schemas.openxmlformats.org/drawingml/2006/main">
+          <a:bodyPr/>
+          <a:p/>
+        </p:txBody>
       </p:sp>
       <p:sp>
         <p:nvSpPr>
@@ -5815,6 +5915,10 @@
             </a:solidFill>
           </a:ln>
         </p:spPr>
+        <p:txBody xmlns:a="http://schemas.openxmlformats.org/drawingml/2006/main">
+          <a:bodyPr/>
+          <a:p/>
+        </p:txBody>
       </p:sp>
       <p:sp>
         <p:nvSpPr>
@@ -5854,6 +5958,10 @@
             </a:solidFill>
           </a:ln>
         </p:spPr>
+        <p:txBody xmlns:a="http://schemas.openxmlformats.org/drawingml/2006/main">
+          <a:bodyPr/>
+          <a:p/>
+        </p:txBody>
       </p:sp>
       <p:sp>
         <p:nvSpPr>
@@ -5884,6 +5992,10 @@
             </a:solidFill>
           </a:ln>
         </p:spPr>
+        <p:txBody xmlns:a="http://schemas.openxmlformats.org/drawingml/2006/main">
+          <a:bodyPr/>
+          <a:p/>
+        </p:txBody>
       </p:sp>
       <p:sp>
         <p:nvSpPr>
@@ -5980,6 +6092,10 @@
             </a:solidFill>
           </a:ln>
         </p:spPr>
+        <p:txBody xmlns:a="http://schemas.openxmlformats.org/drawingml/2006/main">
+          <a:bodyPr/>
+          <a:p/>
+        </p:txBody>
       </p:sp>
       <p:sp>
         <p:nvSpPr>
@@ -6204,7 +6320,7 @@
                 <a:ea typeface="Calibri"/>
                 <a:cs typeface="Calibri"/>
               </a:rPr>
-              <a:t>Vecka 2  ·  12 / 19</a:t>
+              <a:t>Kursvecka 2 · v. 38  ·  12 / 19</a:t>
             </a:r>
           </a:p>
         </p:txBody>
@@ -6645,7 +6761,7 @@
                 <a:ea typeface="Calibri"/>
                 <a:cs typeface="Calibri"/>
               </a:rPr>
-              <a:t>Vecka 2  ·  13 / 19</a:t>
+              <a:t>Kursvecka 2 · v. 38  ·  13 / 19</a:t>
             </a:r>
           </a:p>
         </p:txBody>
@@ -7086,7 +7202,7 @@
                 <a:ea typeface="Calibri"/>
                 <a:cs typeface="Calibri"/>
               </a:rPr>
-              <a:t>Vecka 2  ·  14 / 19</a:t>
+              <a:t>Kursvecka 2 · v. 38  ·  14 / 19</a:t>
             </a:r>
           </a:p>
         </p:txBody>
@@ -7527,7 +7643,7 @@
                 <a:ea typeface="Calibri"/>
                 <a:cs typeface="Calibri"/>
               </a:rPr>
-              <a:t>Vecka 2  ·  15 / 19</a:t>
+              <a:t>Kursvecka 2 · v. 38  ·  15 / 19</a:t>
             </a:r>
           </a:p>
         </p:txBody>
@@ -7968,7 +8084,7 @@
                 <a:ea typeface="Calibri"/>
                 <a:cs typeface="Calibri"/>
               </a:rPr>
-              <a:t>Vecka 2  ·  16 / 19</a:t>
+              <a:t>Kursvecka 2 · v. 38  ·  16 / 19</a:t>
             </a:r>
           </a:p>
         </p:txBody>
@@ -8409,7 +8525,7 @@
                 <a:ea typeface="Calibri"/>
                 <a:cs typeface="Calibri"/>
               </a:rPr>
-              <a:t>Vecka 2  ·  17 / 19</a:t>
+              <a:t>Kursvecka 2 · v. 38  ·  17 / 19</a:t>
             </a:r>
           </a:p>
         </p:txBody>
@@ -8850,7 +8966,7 @@
                 <a:ea typeface="Calibri"/>
                 <a:cs typeface="Calibri"/>
               </a:rPr>
-              <a:t>Vecka 2  ·  18 / 19</a:t>
+              <a:t>Kursvecka 2 · v. 38  ·  18 / 19</a:t>
             </a:r>
           </a:p>
         </p:txBody>
@@ -9291,7 +9407,7 @@
                 <a:ea typeface="Calibri"/>
                 <a:cs typeface="Calibri"/>
               </a:rPr>
-              <a:t>Vecka 2  ·  19 / 19</a:t>
+              <a:t>Kursvecka 2 · v. 38  ·  19 / 19</a:t>
             </a:r>
           </a:p>
         </p:txBody>
@@ -9732,7 +9848,7 @@
                 <a:ea typeface="Calibri"/>
                 <a:cs typeface="Calibri"/>
               </a:rPr>
-              <a:t>Vecka 2  ·  2 / 19</a:t>
+              <a:t>Kursvecka 2 · v. 38  ·  2 / 19</a:t>
             </a:r>
           </a:p>
         </p:txBody>
@@ -10173,7 +10289,7 @@
                 <a:ea typeface="Calibri"/>
                 <a:cs typeface="Calibri"/>
               </a:rPr>
-              <a:t>Vecka 2  ·  3 / 19</a:t>
+              <a:t>Kursvecka 2 · v. 38  ·  3 / 19</a:t>
             </a:r>
           </a:p>
         </p:txBody>
@@ -10317,6 +10433,10 @@
             </a:solidFill>
           </a:ln>
         </p:spPr>
+        <p:txBody xmlns:a="http://schemas.openxmlformats.org/drawingml/2006/main">
+          <a:bodyPr/>
+          <a:p/>
+        </p:txBody>
       </p:sp>
       <p:sp>
         <p:nvSpPr>
@@ -10427,6 +10547,10 @@
             </a:solidFill>
           </a:ln>
         </p:spPr>
+        <p:txBody xmlns:a="http://schemas.openxmlformats.org/drawingml/2006/main">
+          <a:bodyPr/>
+          <a:p/>
+        </p:txBody>
       </p:sp>
       <p:sp>
         <p:nvSpPr>
@@ -10537,6 +10661,10 @@
             </a:solidFill>
           </a:ln>
         </p:spPr>
+        <p:txBody xmlns:a="http://schemas.openxmlformats.org/drawingml/2006/main">
+          <a:bodyPr/>
+          <a:p/>
+        </p:txBody>
       </p:sp>
       <p:sp>
         <p:nvSpPr>
@@ -10647,6 +10775,10 @@
             </a:solidFill>
           </a:ln>
         </p:spPr>
+        <p:txBody xmlns:a="http://schemas.openxmlformats.org/drawingml/2006/main">
+          <a:bodyPr/>
+          <a:p/>
+        </p:txBody>
       </p:sp>
       <p:sp>
         <p:nvSpPr>
@@ -10743,6 +10875,10 @@
             </a:solidFill>
           </a:ln>
         </p:spPr>
+        <p:txBody xmlns:a="http://schemas.openxmlformats.org/drawingml/2006/main">
+          <a:bodyPr/>
+          <a:p/>
+        </p:txBody>
       </p:sp>
       <p:sp>
         <p:nvSpPr>
@@ -10782,6 +10918,10 @@
             </a:solidFill>
           </a:ln>
         </p:spPr>
+        <p:txBody xmlns:a="http://schemas.openxmlformats.org/drawingml/2006/main">
+          <a:bodyPr/>
+          <a:p/>
+        </p:txBody>
       </p:sp>
       <p:sp>
         <p:nvSpPr>
@@ -10821,6 +10961,10 @@
             </a:solidFill>
           </a:ln>
         </p:spPr>
+        <p:txBody xmlns:a="http://schemas.openxmlformats.org/drawingml/2006/main">
+          <a:bodyPr/>
+          <a:p/>
+        </p:txBody>
       </p:sp>
       <p:sp>
         <p:nvSpPr>
@@ -10860,6 +11004,10 @@
             </a:solidFill>
           </a:ln>
         </p:spPr>
+        <p:txBody xmlns:a="http://schemas.openxmlformats.org/drawingml/2006/main">
+          <a:bodyPr/>
+          <a:p/>
+        </p:txBody>
       </p:sp>
       <p:sp>
         <p:nvSpPr>
@@ -10899,6 +11047,10 @@
             </a:solidFill>
           </a:ln>
         </p:spPr>
+        <p:txBody xmlns:a="http://schemas.openxmlformats.org/drawingml/2006/main">
+          <a:bodyPr/>
+          <a:p/>
+        </p:txBody>
       </p:sp>
       <p:sp>
         <p:nvSpPr>
@@ -10938,6 +11090,10 @@
             </a:solidFill>
           </a:ln>
         </p:spPr>
+        <p:txBody xmlns:a="http://schemas.openxmlformats.org/drawingml/2006/main">
+          <a:bodyPr/>
+          <a:p/>
+        </p:txBody>
       </p:sp>
       <p:sp>
         <p:nvSpPr>
@@ -10977,6 +11133,10 @@
             </a:solidFill>
           </a:ln>
         </p:spPr>
+        <p:txBody xmlns:a="http://schemas.openxmlformats.org/drawingml/2006/main">
+          <a:bodyPr/>
+          <a:p/>
+        </p:txBody>
       </p:sp>
       <p:sp>
         <p:nvSpPr>
@@ -11144,7 +11304,7 @@
                 <a:ea typeface="Calibri"/>
                 <a:cs typeface="Calibri"/>
               </a:rPr>
-              <a:t>Vecka 2  ·  4 / 19</a:t>
+              <a:t>Kursvecka 2 · v. 38  ·  4 / 19</a:t>
             </a:r>
           </a:p>
         </p:txBody>
@@ -11612,7 +11772,7 @@
                 <a:ea typeface="Calibri"/>
                 <a:cs typeface="Calibri"/>
               </a:rPr>
-              <a:t>Vecka 2  ·  5 / 19</a:t>
+              <a:t>Kursvecka 2 · v. 38  ·  5 / 19</a:t>
             </a:r>
           </a:p>
         </p:txBody>
@@ -11765,6 +11925,10 @@
             </a:solidFill>
           </a:ln>
         </p:spPr>
+        <p:txBody xmlns:a="http://schemas.openxmlformats.org/drawingml/2006/main">
+          <a:bodyPr/>
+          <a:p/>
+        </p:txBody>
       </p:sp>
       <p:sp>
         <p:nvSpPr>
@@ -11795,6 +11959,10 @@
             </a:solidFill>
           </a:ln>
         </p:spPr>
+        <p:txBody xmlns:a="http://schemas.openxmlformats.org/drawingml/2006/main">
+          <a:bodyPr/>
+          <a:p/>
+        </p:txBody>
       </p:sp>
       <p:sp>
         <p:nvSpPr>
@@ -11834,6 +12002,10 @@
             </a:solidFill>
           </a:ln>
         </p:spPr>
+        <p:txBody xmlns:a="http://schemas.openxmlformats.org/drawingml/2006/main">
+          <a:bodyPr/>
+          <a:p/>
+        </p:txBody>
       </p:sp>
       <p:sp>
         <p:nvSpPr>
@@ -11930,6 +12102,10 @@
             </a:solidFill>
           </a:ln>
         </p:spPr>
+        <p:txBody xmlns:a="http://schemas.openxmlformats.org/drawingml/2006/main">
+          <a:bodyPr/>
+          <a:p/>
+        </p:txBody>
       </p:sp>
       <p:sp>
         <p:nvSpPr>
@@ -11960,6 +12136,10 @@
             </a:solidFill>
           </a:ln>
         </p:spPr>
+        <p:txBody xmlns:a="http://schemas.openxmlformats.org/drawingml/2006/main">
+          <a:bodyPr/>
+          <a:p/>
+        </p:txBody>
       </p:sp>
       <p:sp>
         <p:nvSpPr>
@@ -11990,6 +12170,10 @@
             </a:solidFill>
           </a:ln>
         </p:spPr>
+        <p:txBody xmlns:a="http://schemas.openxmlformats.org/drawingml/2006/main">
+          <a:bodyPr/>
+          <a:p/>
+        </p:txBody>
       </p:sp>
       <p:sp>
         <p:nvSpPr>
@@ -12029,6 +12213,10 @@
             </a:solidFill>
           </a:ln>
         </p:spPr>
+        <p:txBody xmlns:a="http://schemas.openxmlformats.org/drawingml/2006/main">
+          <a:bodyPr/>
+          <a:p/>
+        </p:txBody>
       </p:sp>
       <p:sp>
         <p:nvSpPr>
@@ -12068,6 +12256,10 @@
             </a:solidFill>
           </a:ln>
         </p:spPr>
+        <p:txBody xmlns:a="http://schemas.openxmlformats.org/drawingml/2006/main">
+          <a:bodyPr/>
+          <a:p/>
+        </p:txBody>
       </p:sp>
       <p:sp>
         <p:nvSpPr>
@@ -12155,6 +12347,10 @@
             </a:solidFill>
           </a:ln>
         </p:spPr>
+        <p:txBody xmlns:a="http://schemas.openxmlformats.org/drawingml/2006/main">
+          <a:bodyPr/>
+          <a:p/>
+        </p:txBody>
       </p:sp>
       <p:sp>
         <p:nvSpPr>
@@ -12299,6 +12495,10 @@
             </a:solidFill>
           </a:ln>
         </p:spPr>
+        <p:txBody xmlns:a="http://schemas.openxmlformats.org/drawingml/2006/main">
+          <a:bodyPr/>
+          <a:p/>
+        </p:txBody>
       </p:sp>
       <p:sp>
         <p:nvSpPr>
@@ -12338,6 +12538,10 @@
             </a:solidFill>
           </a:ln>
         </p:spPr>
+        <p:txBody xmlns:a="http://schemas.openxmlformats.org/drawingml/2006/main">
+          <a:bodyPr/>
+          <a:p/>
+        </p:txBody>
       </p:sp>
       <p:sp>
         <p:nvSpPr>
@@ -12425,6 +12629,10 @@
             </a:solidFill>
           </a:ln>
         </p:spPr>
+        <p:txBody xmlns:a="http://schemas.openxmlformats.org/drawingml/2006/main">
+          <a:bodyPr/>
+          <a:p/>
+        </p:txBody>
       </p:sp>
       <p:sp>
         <p:nvSpPr>
@@ -12569,6 +12777,10 @@
             </a:solidFill>
           </a:ln>
         </p:spPr>
+        <p:txBody xmlns:a="http://schemas.openxmlformats.org/drawingml/2006/main">
+          <a:bodyPr/>
+          <a:p/>
+        </p:txBody>
       </p:sp>
       <p:sp>
         <p:nvSpPr>
@@ -12793,7 +13005,7 @@
                 <a:ea typeface="Calibri"/>
                 <a:cs typeface="Calibri"/>
               </a:rPr>
-              <a:t>Vecka 2  ·  6 / 19</a:t>
+              <a:t>Kursvecka 2 · v. 38  ·  6 / 19</a:t>
             </a:r>
           </a:p>
         </p:txBody>
@@ -12937,6 +13149,10 @@
             </a:solidFill>
           </a:ln>
         </p:spPr>
+        <p:txBody xmlns:a="http://schemas.openxmlformats.org/drawingml/2006/main">
+          <a:bodyPr/>
+          <a:p/>
+        </p:txBody>
       </p:sp>
       <p:sp>
         <p:nvSpPr>
@@ -13081,6 +13297,10 @@
             </a:solidFill>
           </a:ln>
         </p:spPr>
+        <p:txBody xmlns:a="http://schemas.openxmlformats.org/drawingml/2006/main">
+          <a:bodyPr/>
+          <a:p/>
+        </p:txBody>
       </p:sp>
       <p:sp>
         <p:nvSpPr>
@@ -13225,6 +13445,10 @@
             </a:solidFill>
           </a:ln>
         </p:spPr>
+        <p:txBody xmlns:a="http://schemas.openxmlformats.org/drawingml/2006/main">
+          <a:bodyPr/>
+          <a:p/>
+        </p:txBody>
       </p:sp>
       <p:sp>
         <p:nvSpPr>
@@ -13369,6 +13593,10 @@
             </a:solidFill>
           </a:ln>
         </p:spPr>
+        <p:txBody xmlns:a="http://schemas.openxmlformats.org/drawingml/2006/main">
+          <a:bodyPr/>
+          <a:p/>
+        </p:txBody>
       </p:sp>
       <p:sp>
         <p:nvSpPr>
@@ -13513,6 +13741,10 @@
             </a:solidFill>
           </a:ln>
         </p:spPr>
+        <p:txBody xmlns:a="http://schemas.openxmlformats.org/drawingml/2006/main">
+          <a:bodyPr/>
+          <a:p/>
+        </p:txBody>
       </p:sp>
       <p:sp>
         <p:nvSpPr>
@@ -13737,7 +13969,7 @@
                 <a:ea typeface="Calibri"/>
                 <a:cs typeface="Calibri"/>
               </a:rPr>
-              <a:t>Vecka 2  ·  7 / 19</a:t>
+              <a:t>Kursvecka 2 · v. 38  ·  7 / 19</a:t>
             </a:r>
           </a:p>
         </p:txBody>
@@ -14205,7 +14437,7 @@
                 <a:ea typeface="Calibri"/>
                 <a:cs typeface="Calibri"/>
               </a:rPr>
-              <a:t>Vecka 2  ·  8 / 19</a:t>
+              <a:t>Kursvecka 2 · v. 38  ·  8 / 19</a:t>
             </a:r>
           </a:p>
         </p:txBody>
@@ -14646,7 +14878,7 @@
                 <a:ea typeface="Calibri"/>
                 <a:cs typeface="Calibri"/>
               </a:rPr>
-              <a:t>Vecka 2  ·  9 / 19</a:t>
+              <a:t>Kursvecka 2 · v. 38  ·  9 / 19</a:t>
             </a:r>
           </a:p>
         </p:txBody>
